--- a/assets/ppts/M3.1_DataLink_Layer_Framing.pptx
+++ b/assets/ppts/M3.1_DataLink_Layer_Framing.pptx
@@ -7,6 +7,8 @@
   <p:sldIdLst>
     <p:sldId id="256" r:id="rId7"/>
     <p:sldId id="257" r:id="rId8"/>
+    <p:sldId id="258" r:id="rId9"/>
+    <p:sldId id="259" r:id="rId10"/>
   </p:sldIdLst>
   <p:sldSz cx="12191695" cy="6858000" type="screen4x3"/>
   <p:notesSz cx="6858000" cy="9144000"/>
@@ -3140,8 +3142,8 @@
         </p:nvSpPr>
         <p:spPr>
           <a:xfrm>
-            <a:off x="822960" y="1188720"/>
-            <a:ext cx="164592" cy="4480560"/>
+            <a:off x="0" y="0"/>
+            <a:ext cx="12191695" cy="137160"/>
           </a:xfrm>
           <a:prstGeom prst="rect">
             <a:avLst/>
@@ -3177,14 +3179,57 @@
       </p:sp>
       <p:sp>
         <p:nvSpPr>
-          <p:cNvPr id="4" name="TextBox 3"/>
+          <p:cNvPr id="4" name="Rectangle 3"/>
+          <p:cNvSpPr/>
+          <p:nvPr/>
+        </p:nvSpPr>
+        <p:spPr>
+          <a:xfrm>
+            <a:off x="822960" y="1097280"/>
+            <a:ext cx="164592" cy="4663440"/>
+          </a:xfrm>
+          <a:prstGeom prst="rect">
+            <a:avLst/>
+          </a:prstGeom>
+          <a:solidFill>
+            <a:srgbClr val="D97706"/>
+          </a:solidFill>
+          <a:ln>
+            <a:noFill/>
+          </a:ln>
+        </p:spPr>
+        <p:style>
+          <a:lnRef idx="1">
+            <a:schemeClr val="accent1"/>
+          </a:lnRef>
+          <a:fillRef idx="3">
+            <a:schemeClr val="accent1"/>
+          </a:fillRef>
+          <a:effectRef idx="2">
+            <a:schemeClr val="accent1"/>
+          </a:effectRef>
+          <a:fontRef idx="minor">
+            <a:schemeClr val="lt1"/>
+          </a:fontRef>
+        </p:style>
+        <p:txBody>
+          <a:bodyPr rtlCol="0" anchor="ctr"/>
+          <a:lstStyle/>
+          <a:p>
+            <a:pPr algn="ctr"/>
+          </a:p>
+        </p:txBody>
+      </p:sp>
+      <p:sp>
+        <p:nvSpPr>
+          <p:cNvPr id="5" name="TextBox 4"/>
           <p:cNvSpPr txBox="1"/>
           <p:nvPr/>
         </p:nvSpPr>
         <p:spPr>
           <a:xfrm>
-            <a:off x="1280160" y="1097280"/>
-            <a:ext cx="10058400" cy="4663440"/>
+            <a:off x="1234440" y="1005840"/>
+            <a:ext cx="10241280" cy="4846320"/>
           </a:xfrm>
           <a:prstGeom prst="rect">
             <a:avLst/>
@@ -3199,70 +3244,165 @@
           <a:p>
             <a:pPr>
               <a:spcAft>
+                <a:spcPts val="1000"/>
+              </a:spcAft>
+              <a:defRPr b="1" sz="1300">
+                <a:solidFill>
+                  <a:srgbClr val="D97706"/>
+                </a:solidFill>
+              </a:defRPr>
+            </a:pPr>
+            <a:r>
+              <a:t>PCCST501 Computer Networks | KTU 2024 Scheme • MODULE 3 • M3.1</a:t>
+            </a:r>
+          </a:p>
+          <a:p>
+            <a:pPr>
+              <a:spcAft>
                 <a:spcPts val="1200"/>
               </a:spcAft>
-              <a:defRPr b="1" sz="1300">
-                <a:solidFill>
-                  <a:srgbClr val="D97706"/>
+              <a:defRPr b="1" sz="3000">
+                <a:solidFill>
+                  <a:srgbClr val="F8FAFC"/>
                 </a:solidFill>
               </a:defRPr>
             </a:pPr>
             <a:r>
-              <a:t>PCCST501 Computer Networks | KTU 2024 Scheme • MODULE 3 • M3.1</a:t>
+              <a:t>Data Link Layer Design &amp; Framing Techniques</a:t>
             </a:r>
           </a:p>
           <a:p>
             <a:pPr>
               <a:spcAft>
-                <a:spcPts val="1400"/>
+                <a:spcPts val="2400"/>
               </a:spcAft>
-              <a:defRPr b="1" sz="3200">
-                <a:solidFill>
-                  <a:srgbClr val="F8FAFC"/>
+              <a:defRPr sz="1600">
+                <a:solidFill>
+                  <a:srgbClr val="94A3B8"/>
                 </a:solidFill>
               </a:defRPr>
             </a:pPr>
             <a:r>
-              <a:t>Data Link Layer &amp; Framing Techniques</a:t>
+              <a:t>Node-to-Node Link Services, Character Count, Byte Stuffing (Flag/ESC), Bit Stuffing (HDLC), Physical Coding Violations</a:t>
             </a:r>
           </a:p>
           <a:p>
             <a:pPr>
               <a:spcAft>
-                <a:spcPts val="2800"/>
+                <a:spcPts val="300"/>
               </a:spcAft>
-              <a:defRPr sz="1700">
+              <a:defRPr b="1" sz="1350">
+                <a:solidFill>
+                  <a:srgbClr val="E2E8F0"/>
+                </a:solidFill>
+              </a:defRPr>
+            </a:pPr>
+            <a:r>
+              <a:t>Prepared by: Prof. Anju Markose | Assistant Professor, Dept. of CSE | VJCET</a:t>
+            </a:r>
+          </a:p>
+          <a:p>
+            <a:pPr>
+              <a:defRPr sz="1150">
                 <a:solidFill>
                   <a:srgbClr val="94A3B8"/>
                 </a:solidFill>
               </a:defRPr>
             </a:pPr>
             <a:r>
-              <a:t>Node-to-Node Delivery, Character Count, Byte Stuffing with Escape Characters &amp; Bit Stuffing with Flags</a:t>
-            </a:r>
-          </a:p>
+              <a:t>Viswajyothi College of Engineering and Technology (VJCET), Vazhakulam • KTU S5 CSE</a:t>
+            </a:r>
+          </a:p>
+        </p:txBody>
+      </p:sp>
+      <p:sp>
+        <p:nvSpPr>
+          <p:cNvPr id="6" name="Rounded Rectangle 5"/>
+          <p:cNvSpPr/>
+          <p:nvPr/>
+        </p:nvSpPr>
+        <p:spPr>
+          <a:xfrm>
+            <a:off x="8412480" y="5120640"/>
+            <a:ext cx="3017520" cy="822960"/>
+          </a:xfrm>
+          <a:prstGeom prst="roundRect">
+            <a:avLst/>
+          </a:prstGeom>
+          <a:solidFill>
+            <a:srgbClr val="1E293B"/>
+          </a:solidFill>
+          <a:ln w="12700">
+            <a:solidFill>
+              <a:srgbClr val="0E7490"/>
+            </a:solidFill>
+          </a:ln>
+        </p:spPr>
+        <p:style>
+          <a:lnRef idx="1">
+            <a:schemeClr val="accent1"/>
+          </a:lnRef>
+          <a:fillRef idx="3">
+            <a:schemeClr val="accent1"/>
+          </a:fillRef>
+          <a:effectRef idx="2">
+            <a:schemeClr val="accent1"/>
+          </a:effectRef>
+          <a:fontRef idx="minor">
+            <a:schemeClr val="lt1"/>
+          </a:fontRef>
+        </p:style>
+        <p:txBody>
+          <a:bodyPr rtlCol="0" anchor="ctr"/>
+          <a:lstStyle/>
+          <a:p>
+            <a:pPr algn="ctr"/>
+          </a:p>
+        </p:txBody>
+      </p:sp>
+      <p:sp>
+        <p:nvSpPr>
+          <p:cNvPr id="7" name="TextBox 6"/>
+          <p:cNvSpPr txBox="1"/>
+          <p:nvPr/>
+        </p:nvSpPr>
+        <p:spPr>
+          <a:xfrm>
+            <a:off x="8503920" y="5166360"/>
+            <a:ext cx="2834640" cy="731520"/>
+          </a:xfrm>
+          <a:prstGeom prst="rect">
+            <a:avLst/>
+          </a:prstGeom>
+          <a:noFill/>
+        </p:spPr>
+        <p:txBody>
+          <a:bodyPr wrap="none">
+            <a:spAutoFit/>
+          </a:bodyPr>
+          <a:lstStyle/>
           <a:p>
             <a:pPr>
-              <a:defRPr b="1" sz="1300">
-                <a:solidFill>
-                  <a:srgbClr val="E2E8F0"/>
+              <a:defRPr b="1" sz="1050">
+                <a:solidFill>
+                  <a:srgbClr val="D97706"/>
                 </a:solidFill>
               </a:defRPr>
             </a:pPr>
             <a:r>
-              <a:t>Prepared by: Prof. Anju Markose | Assistant Professor, Dept. of CSE | VJCET</a:t>
+              <a:t>KTU B.Tech Curriculum</a:t>
             </a:r>
           </a:p>
           <a:p>
             <a:pPr>
-              <a:defRPr sz="1100">
-                <a:solidFill>
-                  <a:srgbClr val="94A3B8"/>
+              <a:defRPr sz="950">
+                <a:solidFill>
+                  <a:srgbClr val="F8FAFC"/>
                 </a:solidFill>
               </a:defRPr>
             </a:pPr>
             <a:r>
-              <a:t>Viswajyothi College of Engineering and Technology (VJCET), Vazhakulam</a:t>
+              <a:t>Official Classroom Slide Deck</a:t>
             </a:r>
           </a:p>
         </p:txBody>
@@ -3394,14 +3534,14 @@
           <a:lstStyle/>
           <a:p>
             <a:pPr>
-              <a:defRPr b="1" sz="2300">
+              <a:defRPr b="1" sz="2200">
                 <a:solidFill>
                   <a:srgbClr val="F8FAFC"/>
                 </a:solidFill>
               </a:defRPr>
             </a:pPr>
             <a:r>
-              <a:t>3.1.1 Data Link Layer Role &amp; Framing</a:t>
+              <a:t>3.1.1 Data Link Layer Design &amp; Link Abstraction</a:t>
             </a:r>
           </a:p>
         </p:txBody>
@@ -3436,7 +3576,7 @@
               </a:defRPr>
             </a:pPr>
             <a:r>
-              <a:t>M3.1 FRAMING CONCEPTS</a:t>
+              <a:t>M3.1 FRAMING BASICS</a:t>
             </a:r>
           </a:p>
         </p:txBody>
@@ -3449,7 +3589,7 @@
         </p:nvSpPr>
         <p:spPr>
           <a:xfrm>
-            <a:off x="731520" y="1280160"/>
+            <a:off x="731520" y="1234440"/>
             <a:ext cx="6858000" cy="4937760"/>
           </a:xfrm>
           <a:prstGeom prst="rect">
@@ -3467,29 +3607,29 @@
               <a:spcAft>
                 <a:spcPts val="200"/>
               </a:spcAft>
-              <a:defRPr b="1" sz="1500">
+              <a:defRPr b="1" sz="1450">
                 <a:solidFill>
                   <a:srgbClr val="0F1E4A"/>
                 </a:solidFill>
               </a:defRPr>
             </a:pPr>
             <a:r>
-              <a:t>• Node-to-Node Delivery</a:t>
+              <a:t>• Node-to-Node Service Mission</a:t>
             </a:r>
           </a:p>
           <a:p>
             <a:pPr>
               <a:spcAft>
-                <a:spcPts val="800"/>
+                <a:spcPts val="700"/>
               </a:spcAft>
-              <a:defRPr sz="1300">
-                <a:solidFill>
-                  <a:srgbClr val="1E293B"/>
+              <a:defRPr sz="1250">
+                <a:solidFill>
+                  <a:srgbClr val="0F172A"/>
                 </a:solidFill>
               </a:defRPr>
             </a:pPr>
             <a:r>
-              <a:t>   Data Link Layer encapsulates Network Layer datagrams into hardware Frames and delivers them across a single physical link between adjacent nodes.</a:t>
+              <a:t>   Responsible for transferring datagrams from one node (host, router, switch) to an adjacent node over an individual physical communication link.</a:t>
             </a:r>
           </a:p>
           <a:p>
@@ -3497,29 +3637,29 @@
               <a:spcAft>
                 <a:spcPts val="200"/>
               </a:spcAft>
-              <a:defRPr b="1" sz="1500">
+              <a:defRPr b="1" sz="1450">
                 <a:solidFill>
                   <a:srgbClr val="0F1E4A"/>
                 </a:solidFill>
               </a:defRPr>
             </a:pPr>
             <a:r>
-              <a:t>• Framing Concept</a:t>
+              <a:t>• Link Layer Responsibilities</a:t>
             </a:r>
           </a:p>
           <a:p>
             <a:pPr>
               <a:spcAft>
-                <a:spcPts val="800"/>
+                <a:spcPts val="700"/>
               </a:spcAft>
-              <a:defRPr sz="1300">
-                <a:solidFill>
-                  <a:srgbClr val="1E293B"/>
+              <a:defRPr sz="1250">
+                <a:solidFill>
+                  <a:srgbClr val="0F172A"/>
                 </a:solidFill>
               </a:defRPr>
             </a:pPr>
             <a:r>
-              <a:t>   Dividing the raw bit stream from the Physical Layer into discrete, manageable data units (frames) with identifiable boundaries.</a:t>
+              <a:t>   1. **Framing**: Encapsulating L3 datagrams into L2 frames with header and trailer. 2. **Link Access**: MAC protocols coordinate shared medium access. 3. **Reliable Delivery**: Flow control and ARQ on error-prone wireless links. 4. **Error Detection &amp; Correction**: Parity, Checksum, CRC, Hamming codes.</a:t>
             </a:r>
           </a:p>
           <a:p>
@@ -3527,89 +3667,29 @@
               <a:spcAft>
                 <a:spcPts val="200"/>
               </a:spcAft>
-              <a:defRPr b="1" sz="1500">
+              <a:defRPr b="1" sz="1450">
                 <a:solidFill>
                   <a:srgbClr val="0F1E4A"/>
                 </a:solidFill>
               </a:defRPr>
             </a:pPr>
             <a:r>
-              <a:t>• Character Count Method</a:t>
+              <a:t>• Framing Methods Overview</a:t>
             </a:r>
           </a:p>
           <a:p>
             <a:pPr>
               <a:spcAft>
-                <a:spcPts val="800"/>
+                <a:spcPts val="700"/>
               </a:spcAft>
-              <a:defRPr sz="1300">
-                <a:solidFill>
-                  <a:srgbClr val="1E293B"/>
+              <a:defRPr sz="1250">
+                <a:solidFill>
+                  <a:srgbClr val="0F172A"/>
                 </a:solidFill>
               </a:defRPr>
             </a:pPr>
             <a:r>
-              <a:t>   Frame header includes a field specifying total number of characters in the frame. Flaw: If a transmission error corrupts the count field, sender and receiver lose synchronization permanently!</a:t>
-            </a:r>
-          </a:p>
-          <a:p>
-            <a:pPr>
-              <a:spcAft>
-                <a:spcPts val="200"/>
-              </a:spcAft>
-              <a:defRPr b="1" sz="1500">
-                <a:solidFill>
-                  <a:srgbClr val="0F1E4A"/>
-                </a:solidFill>
-              </a:defRPr>
-            </a:pPr>
-            <a:r>
-              <a:t>• Byte Stuffing (Character-Oriented)</a:t>
-            </a:r>
-          </a:p>
-          <a:p>
-            <a:pPr>
-              <a:spcAft>
-                <a:spcPts val="800"/>
-              </a:spcAft>
-              <a:defRPr sz="1300">
-                <a:solidFill>
-                  <a:srgbClr val="1E293B"/>
-                </a:solidFill>
-              </a:defRPr>
-            </a:pPr>
-            <a:r>
-              <a:t>   Frame delimited by special flag bytes (e.g. `FLAG` = `0x7E`). Whenever `FLAG` or `ESC` occurs in payload data, sender inserts an escape byte (`ESC` = `0x1B`) before it. Receiver removes `ESC`.</a:t>
-            </a:r>
-          </a:p>
-          <a:p>
-            <a:pPr>
-              <a:spcAft>
-                <a:spcPts val="200"/>
-              </a:spcAft>
-              <a:defRPr b="1" sz="1500">
-                <a:solidFill>
-                  <a:srgbClr val="0F1E4A"/>
-                </a:solidFill>
-              </a:defRPr>
-            </a:pPr>
-            <a:r>
-              <a:t>• Bit Stuffing (Bit-Oriented - HDLC/PPP)</a:t>
-            </a:r>
-          </a:p>
-          <a:p>
-            <a:pPr>
-              <a:spcAft>
-                <a:spcPts val="800"/>
-              </a:spcAft>
-              <a:defRPr sz="1300">
-                <a:solidFill>
-                  <a:srgbClr val="1E293B"/>
-                </a:solidFill>
-              </a:defRPr>
-            </a:pPr>
-            <a:r>
-              <a:t>   Frame delimited by special flag pattern `01111110` (six consecutive 1s). Whenever sender detects FIVE consecutive 1s in payload, it automatically stuffs a '0' bit. Receiver strips the stuffed '0' after five 1s.</a:t>
+              <a:t>   1. Character Count, 2. Byte Stuffing (Character-oriented), 3. Bit Stuffing (Bit-oriented), 4. Physical Layer Coding Violations (e.g., Manchester invalid transitions).</a:t>
             </a:r>
           </a:p>
         </p:txBody>
@@ -3622,14 +3702,14 @@
         </p:nvSpPr>
         <p:spPr>
           <a:xfrm>
-            <a:off x="7955279" y="1280160"/>
-            <a:ext cx="3566160" cy="4846320"/>
+            <a:off x="7955279" y="1234440"/>
+            <a:ext cx="3566160" cy="4892040"/>
           </a:xfrm>
           <a:prstGeom prst="roundRect">
             <a:avLst/>
           </a:prstGeom>
           <a:solidFill>
-            <a:srgbClr val="F1F5F9"/>
+            <a:srgbClr val="F8FAFC"/>
           </a:solidFill>
           <a:ln w="19050">
             <a:solidFill>
@@ -3667,7 +3747,7 @@
         </p:nvSpPr>
         <p:spPr>
           <a:xfrm>
-            <a:off x="8138160" y="1417320"/>
+            <a:off x="8138160" y="1371600"/>
             <a:ext cx="3200400" cy="4572000"/>
           </a:xfrm>
           <a:prstGeom prst="rect">
@@ -3692,7 +3772,7 @@
               </a:defRPr>
             </a:pPr>
             <a:r>
-              <a:t>Bit Stuffing Rule</a:t>
+              <a:t>Framing Taxonomy</a:t>
             </a:r>
           </a:p>
           <a:p>
@@ -3702,12 +3782,12 @@
               </a:spcAft>
               <a:defRPr sz="1200">
                 <a:solidFill>
-                  <a:srgbClr val="1E293B"/>
+                  <a:srgbClr val="0F172A"/>
                 </a:solidFill>
               </a:defRPr>
             </a:pPr>
             <a:r>
-              <a:t>→ Flag: 01111110 (6 ones)</a:t>
+              <a:t>→ Byte Count: Header count field</a:t>
             </a:r>
           </a:p>
           <a:p>
@@ -3717,12 +3797,12 @@
               </a:spcAft>
               <a:defRPr sz="1200">
                 <a:solidFill>
-                  <a:srgbClr val="1E293B"/>
+                  <a:srgbClr val="0F172A"/>
                 </a:solidFill>
               </a:defRPr>
             </a:pPr>
             <a:r>
-              <a:t>→ Sender: Stuffs '0' after 5 ones</a:t>
+              <a:t>→ Byte Stuffing: Flag + ESC bytes</a:t>
             </a:r>
           </a:p>
           <a:p>
@@ -3732,12 +3812,12 @@
               </a:spcAft>
               <a:defRPr sz="1200">
                 <a:solidFill>
-                  <a:srgbClr val="1E293B"/>
+                  <a:srgbClr val="0F172A"/>
                 </a:solidFill>
               </a:defRPr>
             </a:pPr>
             <a:r>
-              <a:t>→ Example Data: 01111110</a:t>
+              <a:t>→ Bit Stuffing: 5 consecutive 1s rule</a:t>
             </a:r>
           </a:p>
           <a:p>
@@ -3747,12 +3827,12 @@
               </a:spcAft>
               <a:defRPr sz="1200">
                 <a:solidFill>
-                  <a:srgbClr val="1E293B"/>
+                  <a:srgbClr val="0F172A"/>
                 </a:solidFill>
               </a:defRPr>
             </a:pPr>
             <a:r>
-              <a:t>→ Transmitted: 011111010</a:t>
+              <a:t>→ Physical Violations: Line coding</a:t>
             </a:r>
           </a:p>
           <a:p>
@@ -3762,12 +3842,12 @@
               </a:spcAft>
               <a:defRPr sz="1200">
                 <a:solidFill>
-                  <a:srgbClr val="1E293B"/>
+                  <a:srgbClr val="0F172A"/>
                 </a:solidFill>
               </a:defRPr>
             </a:pPr>
             <a:r>
-              <a:t>→ Receiver: Strips '0' after 5 ones</a:t>
+              <a:t>→ FCS: CRC trailer at end</a:t>
             </a:r>
           </a:p>
         </p:txBody>
@@ -3780,8 +3860,8 @@
         </p:nvSpPr>
         <p:spPr>
           <a:xfrm>
-            <a:off x="731520" y="6309360"/>
-            <a:ext cx="10789920" cy="365760"/>
+            <a:off x="731520" y="6327648"/>
+            <a:ext cx="10789920" cy="320040"/>
           </a:xfrm>
           <a:prstGeom prst="rect">
             <a:avLst/>
@@ -3803,6 +3883,1056 @@
             </a:pPr>
             <a:r>
               <a:t>PCCST501 Computer Networks | KTU 2024 Scheme | Prof. Anju Markose | Assistant Professor, Dept. of CSE | VJCET</a:t>
+            </a:r>
+          </a:p>
+        </p:txBody>
+      </p:sp>
+      <p:sp>
+        <p:nvSpPr>
+          <p:cNvPr id="10" name="TextBox 9"/>
+          <p:cNvSpPr txBox="1"/>
+          <p:nvPr/>
+        </p:nvSpPr>
+        <p:spPr>
+          <a:xfrm>
+            <a:off x="6858000" y="6327648"/>
+            <a:ext cx="4572000" cy="320040"/>
+          </a:xfrm>
+          <a:prstGeom prst="rect">
+            <a:avLst/>
+          </a:prstGeom>
+          <a:noFill/>
+        </p:spPr>
+        <p:txBody>
+          <a:bodyPr wrap="none">
+            <a:spAutoFit/>
+          </a:bodyPr>
+          <a:lstStyle/>
+          <a:p>
+            <a:pPr algn="r">
+              <a:defRPr sz="950">
+                <a:solidFill>
+                  <a:srgbClr val="64748B"/>
+                </a:solidFill>
+              </a:defRPr>
+            </a:pPr>
+            <a:r>
+              <a:t>Dept. of CSE, VJCET</a:t>
+            </a:r>
+          </a:p>
+        </p:txBody>
+      </p:sp>
+    </p:spTree>
+  </p:cSld>
+  <p:clrMapOvr>
+    <a:masterClrMapping/>
+  </p:clrMapOvr>
+</p:sld>
+</file>
+
+<file path=ppt/slides/slide3.xml><?xml version="1.0" encoding="utf-8"?>
+<p:sld xmlns:a="http://schemas.openxmlformats.org/drawingml/2006/main" xmlns:p="http://schemas.openxmlformats.org/presentationml/2006/main" xmlns:r="http://schemas.openxmlformats.org/officeDocument/2006/relationships">
+  <p:cSld>
+    <p:spTree>
+      <p:nvGrpSpPr>
+        <p:cNvPr id="1" name=""/>
+        <p:cNvGrpSpPr/>
+        <p:nvPr/>
+      </p:nvGrpSpPr>
+      <p:grpSpPr/>
+      <p:sp>
+        <p:nvSpPr>
+          <p:cNvPr id="2" name="Rectangle 1"/>
+          <p:cNvSpPr/>
+          <p:nvPr/>
+        </p:nvSpPr>
+        <p:spPr>
+          <a:xfrm>
+            <a:off x="0" y="0"/>
+            <a:ext cx="12191695" cy="1005840"/>
+          </a:xfrm>
+          <a:prstGeom prst="rect">
+            <a:avLst/>
+          </a:prstGeom>
+          <a:solidFill>
+            <a:srgbClr val="0F1E4A"/>
+          </a:solidFill>
+          <a:ln>
+            <a:noFill/>
+          </a:ln>
+        </p:spPr>
+        <p:style>
+          <a:lnRef idx="1">
+            <a:schemeClr val="accent1"/>
+          </a:lnRef>
+          <a:fillRef idx="3">
+            <a:schemeClr val="accent1"/>
+          </a:fillRef>
+          <a:effectRef idx="2">
+            <a:schemeClr val="accent1"/>
+          </a:effectRef>
+          <a:fontRef idx="minor">
+            <a:schemeClr val="lt1"/>
+          </a:fontRef>
+        </p:style>
+        <p:txBody>
+          <a:bodyPr rtlCol="0" anchor="ctr"/>
+          <a:lstStyle/>
+          <a:p>
+            <a:pPr algn="ctr"/>
+          </a:p>
+        </p:txBody>
+      </p:sp>
+      <p:sp>
+        <p:nvSpPr>
+          <p:cNvPr id="3" name="Rectangle 2"/>
+          <p:cNvSpPr/>
+          <p:nvPr/>
+        </p:nvSpPr>
+        <p:spPr>
+          <a:xfrm>
+            <a:off x="0" y="969264"/>
+            <a:ext cx="12191695" cy="36576"/>
+          </a:xfrm>
+          <a:prstGeom prst="rect">
+            <a:avLst/>
+          </a:prstGeom>
+          <a:solidFill>
+            <a:srgbClr val="D97706"/>
+          </a:solidFill>
+          <a:ln>
+            <a:noFill/>
+          </a:ln>
+        </p:spPr>
+        <p:style>
+          <a:lnRef idx="1">
+            <a:schemeClr val="accent1"/>
+          </a:lnRef>
+          <a:fillRef idx="3">
+            <a:schemeClr val="accent1"/>
+          </a:fillRef>
+          <a:effectRef idx="2">
+            <a:schemeClr val="accent1"/>
+          </a:effectRef>
+          <a:fontRef idx="minor">
+            <a:schemeClr val="lt1"/>
+          </a:fontRef>
+        </p:style>
+        <p:txBody>
+          <a:bodyPr rtlCol="0" anchor="ctr"/>
+          <a:lstStyle/>
+          <a:p>
+            <a:pPr algn="ctr"/>
+          </a:p>
+        </p:txBody>
+      </p:sp>
+      <p:sp>
+        <p:nvSpPr>
+          <p:cNvPr id="4" name="TextBox 3"/>
+          <p:cNvSpPr txBox="1"/>
+          <p:nvPr/>
+        </p:nvSpPr>
+        <p:spPr>
+          <a:xfrm>
+            <a:off x="731520" y="164592"/>
+            <a:ext cx="8412480" cy="685800"/>
+          </a:xfrm>
+          <a:prstGeom prst="rect">
+            <a:avLst/>
+          </a:prstGeom>
+          <a:noFill/>
+        </p:spPr>
+        <p:txBody>
+          <a:bodyPr wrap="none">
+            <a:spAutoFit/>
+          </a:bodyPr>
+          <a:lstStyle/>
+          <a:p>
+            <a:pPr>
+              <a:defRPr b="1" sz="2200">
+                <a:solidFill>
+                  <a:srgbClr val="F8FAFC"/>
+                </a:solidFill>
+              </a:defRPr>
+            </a:pPr>
+            <a:r>
+              <a:t>3.1.2 Stuffing Techniques: Byte Stuffing vs Bit Stuffing</a:t>
+            </a:r>
+          </a:p>
+        </p:txBody>
+      </p:sp>
+      <p:sp>
+        <p:nvSpPr>
+          <p:cNvPr id="5" name="TextBox 4"/>
+          <p:cNvSpPr txBox="1"/>
+          <p:nvPr/>
+        </p:nvSpPr>
+        <p:spPr>
+          <a:xfrm>
+            <a:off x="8229600" y="164592"/>
+            <a:ext cx="3291840" cy="685800"/>
+          </a:xfrm>
+          <a:prstGeom prst="rect">
+            <a:avLst/>
+          </a:prstGeom>
+          <a:noFill/>
+        </p:spPr>
+        <p:txBody>
+          <a:bodyPr wrap="none">
+            <a:spAutoFit/>
+          </a:bodyPr>
+          <a:lstStyle/>
+          <a:p>
+            <a:pPr algn="r">
+              <a:defRPr b="1" sz="1300">
+                <a:solidFill>
+                  <a:srgbClr val="D97706"/>
+                </a:solidFill>
+              </a:defRPr>
+            </a:pPr>
+            <a:r>
+              <a:t>M3.1 STUFFING COMPARISON</a:t>
+            </a:r>
+          </a:p>
+        </p:txBody>
+      </p:sp>
+      <p:sp>
+        <p:nvSpPr>
+          <p:cNvPr id="6" name="Rounded Rectangle 5"/>
+          <p:cNvSpPr/>
+          <p:nvPr/>
+        </p:nvSpPr>
+        <p:spPr>
+          <a:xfrm>
+            <a:off x="731520" y="1234440"/>
+            <a:ext cx="5212080" cy="4892040"/>
+          </a:xfrm>
+          <a:prstGeom prst="roundRect">
+            <a:avLst/>
+          </a:prstGeom>
+          <a:solidFill>
+            <a:srgbClr val="F8FAFC"/>
+          </a:solidFill>
+          <a:ln w="19050">
+            <a:solidFill>
+              <a:srgbClr val="0F1E4A"/>
+            </a:solidFill>
+          </a:ln>
+        </p:spPr>
+        <p:style>
+          <a:lnRef idx="1">
+            <a:schemeClr val="accent1"/>
+          </a:lnRef>
+          <a:fillRef idx="3">
+            <a:schemeClr val="accent1"/>
+          </a:fillRef>
+          <a:effectRef idx="2">
+            <a:schemeClr val="accent1"/>
+          </a:effectRef>
+          <a:fontRef idx="minor">
+            <a:schemeClr val="lt1"/>
+          </a:fontRef>
+        </p:style>
+        <p:txBody>
+          <a:bodyPr rtlCol="0" anchor="ctr"/>
+          <a:lstStyle/>
+          <a:p>
+            <a:pPr algn="ctr"/>
+          </a:p>
+        </p:txBody>
+      </p:sp>
+      <p:sp>
+        <p:nvSpPr>
+          <p:cNvPr id="7" name="TextBox 6"/>
+          <p:cNvSpPr txBox="1"/>
+          <p:nvPr/>
+        </p:nvSpPr>
+        <p:spPr>
+          <a:xfrm>
+            <a:off x="914400" y="1371600"/>
+            <a:ext cx="4846320" cy="4572000"/>
+          </a:xfrm>
+          <a:prstGeom prst="rect">
+            <a:avLst/>
+          </a:prstGeom>
+          <a:noFill/>
+        </p:spPr>
+        <p:txBody>
+          <a:bodyPr wrap="square">
+            <a:spAutoFit/>
+          </a:bodyPr>
+          <a:lstStyle/>
+          <a:p>
+            <a:pPr>
+              <a:spcAft>
+                <a:spcPts val="1000"/>
+              </a:spcAft>
+              <a:defRPr b="1" sz="1550">
+                <a:solidFill>
+                  <a:srgbClr val="0F1E4A"/>
+                </a:solidFill>
+              </a:defRPr>
+            </a:pPr>
+            <a:r>
+              <a:t>Byte Stuffing (Character-Oriented Framing)</a:t>
+            </a:r>
+          </a:p>
+          <a:p>
+            <a:pPr>
+              <a:spcAft>
+                <a:spcPts val="500"/>
+              </a:spcAft>
+              <a:defRPr sz="1200">
+                <a:solidFill>
+                  <a:srgbClr val="0F172A"/>
+                </a:solidFill>
+              </a:defRPr>
+            </a:pPr>
+            <a:r>
+              <a:t>• Delimiter: Frame begins and ends with dedicated Flag Byte `FLAG` (e.g., `0x7E` in PPP)</a:t>
+            </a:r>
+          </a:p>
+          <a:p>
+            <a:pPr>
+              <a:spcAft>
+                <a:spcPts val="500"/>
+              </a:spcAft>
+              <a:defRPr sz="1200">
+                <a:solidFill>
+                  <a:srgbClr val="0F172A"/>
+                </a:solidFill>
+              </a:defRPr>
+            </a:pPr>
+            <a:r>
+              <a:t>• Escape Mechanism: If `FLAG` occurs inside payload data, sender inserts an Escape Byte `ESC` (`0x7D`) immediately before it</a:t>
+            </a:r>
+          </a:p>
+          <a:p>
+            <a:pPr>
+              <a:spcAft>
+                <a:spcPts val="500"/>
+              </a:spcAft>
+              <a:defRPr sz="1200">
+                <a:solidFill>
+                  <a:srgbClr val="0F172A"/>
+                </a:solidFill>
+              </a:defRPr>
+            </a:pPr>
+            <a:r>
+              <a:t>• ESC in Data: If `ESC` itself appears in data, sender escapes it with another `ESC` (`ESC ESC`)</a:t>
+            </a:r>
+          </a:p>
+          <a:p>
+            <a:pPr>
+              <a:spcAft>
+                <a:spcPts val="500"/>
+              </a:spcAft>
+              <a:defRPr sz="1200">
+                <a:solidFill>
+                  <a:srgbClr val="0F172A"/>
+                </a:solidFill>
+              </a:defRPr>
+            </a:pPr>
+            <a:r>
+              <a:t>• Receiver Action: Receiver strips any `ESC` byte and treats following byte as raw data</a:t>
+            </a:r>
+          </a:p>
+        </p:txBody>
+      </p:sp>
+      <p:sp>
+        <p:nvSpPr>
+          <p:cNvPr id="8" name="Rounded Rectangle 7"/>
+          <p:cNvSpPr/>
+          <p:nvPr/>
+        </p:nvSpPr>
+        <p:spPr>
+          <a:xfrm>
+            <a:off x="6309360" y="1234440"/>
+            <a:ext cx="5212080" cy="4892040"/>
+          </a:xfrm>
+          <a:prstGeom prst="roundRect">
+            <a:avLst/>
+          </a:prstGeom>
+          <a:solidFill>
+            <a:srgbClr val="EEF2FF"/>
+          </a:solidFill>
+          <a:ln w="19050">
+            <a:solidFill>
+              <a:srgbClr val="0E7490"/>
+            </a:solidFill>
+          </a:ln>
+        </p:spPr>
+        <p:style>
+          <a:lnRef idx="1">
+            <a:schemeClr val="accent1"/>
+          </a:lnRef>
+          <a:fillRef idx="3">
+            <a:schemeClr val="accent1"/>
+          </a:fillRef>
+          <a:effectRef idx="2">
+            <a:schemeClr val="accent1"/>
+          </a:effectRef>
+          <a:fontRef idx="minor">
+            <a:schemeClr val="lt1"/>
+          </a:fontRef>
+        </p:style>
+        <p:txBody>
+          <a:bodyPr rtlCol="0" anchor="ctr"/>
+          <a:lstStyle/>
+          <a:p>
+            <a:pPr algn="ctr"/>
+          </a:p>
+        </p:txBody>
+      </p:sp>
+      <p:sp>
+        <p:nvSpPr>
+          <p:cNvPr id="9" name="TextBox 8"/>
+          <p:cNvSpPr txBox="1"/>
+          <p:nvPr/>
+        </p:nvSpPr>
+        <p:spPr>
+          <a:xfrm>
+            <a:off x="6492240" y="1371600"/>
+            <a:ext cx="4846320" cy="4572000"/>
+          </a:xfrm>
+          <a:prstGeom prst="rect">
+            <a:avLst/>
+          </a:prstGeom>
+          <a:noFill/>
+        </p:spPr>
+        <p:txBody>
+          <a:bodyPr wrap="square">
+            <a:spAutoFit/>
+          </a:bodyPr>
+          <a:lstStyle/>
+          <a:p>
+            <a:pPr>
+              <a:spcAft>
+                <a:spcPts val="1000"/>
+              </a:spcAft>
+              <a:defRPr b="1" sz="1550">
+                <a:solidFill>
+                  <a:srgbClr val="0E7490"/>
+                </a:solidFill>
+              </a:defRPr>
+            </a:pPr>
+            <a:r>
+              <a:t>Bit Stuffing (Bit-Oriented Framing / HDLC)</a:t>
+            </a:r>
+          </a:p>
+          <a:p>
+            <a:pPr>
+              <a:spcAft>
+                <a:spcPts val="500"/>
+              </a:spcAft>
+              <a:defRPr sz="1200">
+                <a:solidFill>
+                  <a:srgbClr val="0F172A"/>
+                </a:solidFill>
+              </a:defRPr>
+            </a:pPr>
+            <a:r>
+              <a:t>• Delimiter Pattern: Frame delimited by 8-bit flag pattern `01111110` (`0x7E`) at start and end</a:t>
+            </a:r>
+          </a:p>
+          <a:p>
+            <a:pPr>
+              <a:spcAft>
+                <a:spcPts val="500"/>
+              </a:spcAft>
+              <a:defRPr sz="1200">
+                <a:solidFill>
+                  <a:srgbClr val="0F172A"/>
+                </a:solidFill>
+              </a:defRPr>
+            </a:pPr>
+            <a:r>
+              <a:t>• Sender Rule: Whenever sender encounters **5 consecutive 1s** in data stream (`11111`), it automatically stuffs a **`0` bit** immediately after it</a:t>
+            </a:r>
+          </a:p>
+          <a:p>
+            <a:pPr>
+              <a:spcAft>
+                <a:spcPts val="500"/>
+              </a:spcAft>
+              <a:defRPr sz="1200">
+                <a:solidFill>
+                  <a:srgbClr val="0F172A"/>
+                </a:solidFill>
+              </a:defRPr>
+            </a:pPr>
+            <a:r>
+              <a:t>• Receiver Rule: Whenever receiver detects 5 consecutive 1s: if 6th bit is `0`, it de-stuffs (discards) the `0`; if 6th bit is `1` and 7th is `0`, it recognizes `FLAG`</a:t>
+            </a:r>
+          </a:p>
+          <a:p>
+            <a:pPr>
+              <a:spcAft>
+                <a:spcPts val="500"/>
+              </a:spcAft>
+              <a:defRPr sz="1200">
+                <a:solidFill>
+                  <a:srgbClr val="0F172A"/>
+                </a:solidFill>
+              </a:defRPr>
+            </a:pPr>
+            <a:r>
+              <a:t>• Advantage: Completely arbitrary payload length; zero character-set dependency</a:t>
+            </a:r>
+          </a:p>
+        </p:txBody>
+      </p:sp>
+      <p:sp>
+        <p:nvSpPr>
+          <p:cNvPr id="10" name="TextBox 9"/>
+          <p:cNvSpPr txBox="1"/>
+          <p:nvPr/>
+        </p:nvSpPr>
+        <p:spPr>
+          <a:xfrm>
+            <a:off x="731520" y="6327648"/>
+            <a:ext cx="10789920" cy="320040"/>
+          </a:xfrm>
+          <a:prstGeom prst="rect">
+            <a:avLst/>
+          </a:prstGeom>
+          <a:noFill/>
+        </p:spPr>
+        <p:txBody>
+          <a:bodyPr wrap="none">
+            <a:spAutoFit/>
+          </a:bodyPr>
+          <a:lstStyle/>
+          <a:p>
+            <a:pPr>
+              <a:defRPr sz="950">
+                <a:solidFill>
+                  <a:srgbClr val="64748B"/>
+                </a:solidFill>
+              </a:defRPr>
+            </a:pPr>
+            <a:r>
+              <a:t>PCCST501 Computer Networks | KTU 2024 Scheme | Prof. Anju Markose | Assistant Professor, Dept. of CSE | VJCET</a:t>
+            </a:r>
+          </a:p>
+        </p:txBody>
+      </p:sp>
+      <p:sp>
+        <p:nvSpPr>
+          <p:cNvPr id="11" name="TextBox 10"/>
+          <p:cNvSpPr txBox="1"/>
+          <p:nvPr/>
+        </p:nvSpPr>
+        <p:spPr>
+          <a:xfrm>
+            <a:off x="6858000" y="6327648"/>
+            <a:ext cx="4572000" cy="320040"/>
+          </a:xfrm>
+          <a:prstGeom prst="rect">
+            <a:avLst/>
+          </a:prstGeom>
+          <a:noFill/>
+        </p:spPr>
+        <p:txBody>
+          <a:bodyPr wrap="none">
+            <a:spAutoFit/>
+          </a:bodyPr>
+          <a:lstStyle/>
+          <a:p>
+            <a:pPr algn="r">
+              <a:defRPr sz="950">
+                <a:solidFill>
+                  <a:srgbClr val="64748B"/>
+                </a:solidFill>
+              </a:defRPr>
+            </a:pPr>
+            <a:r>
+              <a:t>Dept. of CSE, VJCET</a:t>
+            </a:r>
+          </a:p>
+        </p:txBody>
+      </p:sp>
+    </p:spTree>
+  </p:cSld>
+  <p:clrMapOvr>
+    <a:masterClrMapping/>
+  </p:clrMapOvr>
+</p:sld>
+</file>
+
+<file path=ppt/slides/slide4.xml><?xml version="1.0" encoding="utf-8"?>
+<p:sld xmlns:a="http://schemas.openxmlformats.org/drawingml/2006/main" xmlns:p="http://schemas.openxmlformats.org/presentationml/2006/main" xmlns:r="http://schemas.openxmlformats.org/officeDocument/2006/relationships">
+  <p:cSld>
+    <p:spTree>
+      <p:nvGrpSpPr>
+        <p:cNvPr id="1" name=""/>
+        <p:cNvGrpSpPr/>
+        <p:nvPr/>
+      </p:nvGrpSpPr>
+      <p:grpSpPr/>
+      <p:sp>
+        <p:nvSpPr>
+          <p:cNvPr id="2" name="Rectangle 1"/>
+          <p:cNvSpPr/>
+          <p:nvPr/>
+        </p:nvSpPr>
+        <p:spPr>
+          <a:xfrm>
+            <a:off x="0" y="0"/>
+            <a:ext cx="12191695" cy="1005840"/>
+          </a:xfrm>
+          <a:prstGeom prst="rect">
+            <a:avLst/>
+          </a:prstGeom>
+          <a:solidFill>
+            <a:srgbClr val="0F1E4A"/>
+          </a:solidFill>
+          <a:ln>
+            <a:noFill/>
+          </a:ln>
+        </p:spPr>
+        <p:style>
+          <a:lnRef idx="1">
+            <a:schemeClr val="accent1"/>
+          </a:lnRef>
+          <a:fillRef idx="3">
+            <a:schemeClr val="accent1"/>
+          </a:fillRef>
+          <a:effectRef idx="2">
+            <a:schemeClr val="accent1"/>
+          </a:effectRef>
+          <a:fontRef idx="minor">
+            <a:schemeClr val="lt1"/>
+          </a:fontRef>
+        </p:style>
+        <p:txBody>
+          <a:bodyPr rtlCol="0" anchor="ctr"/>
+          <a:lstStyle/>
+          <a:p>
+            <a:pPr algn="ctr"/>
+          </a:p>
+        </p:txBody>
+      </p:sp>
+      <p:sp>
+        <p:nvSpPr>
+          <p:cNvPr id="3" name="Rectangle 2"/>
+          <p:cNvSpPr/>
+          <p:nvPr/>
+        </p:nvSpPr>
+        <p:spPr>
+          <a:xfrm>
+            <a:off x="0" y="969264"/>
+            <a:ext cx="12191695" cy="36576"/>
+          </a:xfrm>
+          <a:prstGeom prst="rect">
+            <a:avLst/>
+          </a:prstGeom>
+          <a:solidFill>
+            <a:srgbClr val="D97706"/>
+          </a:solidFill>
+          <a:ln>
+            <a:noFill/>
+          </a:ln>
+        </p:spPr>
+        <p:style>
+          <a:lnRef idx="1">
+            <a:schemeClr val="accent1"/>
+          </a:lnRef>
+          <a:fillRef idx="3">
+            <a:schemeClr val="accent1"/>
+          </a:fillRef>
+          <a:effectRef idx="2">
+            <a:schemeClr val="accent1"/>
+          </a:effectRef>
+          <a:fontRef idx="minor">
+            <a:schemeClr val="lt1"/>
+          </a:fontRef>
+        </p:style>
+        <p:txBody>
+          <a:bodyPr rtlCol="0" anchor="ctr"/>
+          <a:lstStyle/>
+          <a:p>
+            <a:pPr algn="ctr"/>
+          </a:p>
+        </p:txBody>
+      </p:sp>
+      <p:sp>
+        <p:nvSpPr>
+          <p:cNvPr id="4" name="TextBox 3"/>
+          <p:cNvSpPr txBox="1"/>
+          <p:nvPr/>
+        </p:nvSpPr>
+        <p:spPr>
+          <a:xfrm>
+            <a:off x="731520" y="164592"/>
+            <a:ext cx="8412480" cy="685800"/>
+          </a:xfrm>
+          <a:prstGeom prst="rect">
+            <a:avLst/>
+          </a:prstGeom>
+          <a:noFill/>
+        </p:spPr>
+        <p:txBody>
+          <a:bodyPr wrap="none">
+            <a:spAutoFit/>
+          </a:bodyPr>
+          <a:lstStyle/>
+          <a:p>
+            <a:pPr>
+              <a:defRPr b="1" sz="2100">
+                <a:solidFill>
+                  <a:srgbClr val="F8FAFC"/>
+                </a:solidFill>
+              </a:defRPr>
+            </a:pPr>
+            <a:r>
+              <a:t>🎯 Exam Booster &amp; Review: Data Link Layer Framing</a:t>
+            </a:r>
+          </a:p>
+        </p:txBody>
+      </p:sp>
+      <p:sp>
+        <p:nvSpPr>
+          <p:cNvPr id="5" name="TextBox 4"/>
+          <p:cNvSpPr txBox="1"/>
+          <p:nvPr/>
+        </p:nvSpPr>
+        <p:spPr>
+          <a:xfrm>
+            <a:off x="8229600" y="164592"/>
+            <a:ext cx="3291840" cy="685800"/>
+          </a:xfrm>
+          <a:prstGeom prst="rect">
+            <a:avLst/>
+          </a:prstGeom>
+          <a:noFill/>
+        </p:spPr>
+        <p:txBody>
+          <a:bodyPr wrap="none">
+            <a:spAutoFit/>
+          </a:bodyPr>
+          <a:lstStyle/>
+          <a:p>
+            <a:pPr algn="r">
+              <a:defRPr b="1" sz="1300">
+                <a:solidFill>
+                  <a:srgbClr val="D97706"/>
+                </a:solidFill>
+              </a:defRPr>
+            </a:pPr>
+            <a:r>
+              <a:t>M3.1</a:t>
+            </a:r>
+          </a:p>
+        </p:txBody>
+      </p:sp>
+      <p:sp>
+        <p:nvSpPr>
+          <p:cNvPr id="6" name="Rounded Rectangle 5"/>
+          <p:cNvSpPr/>
+          <p:nvPr/>
+        </p:nvSpPr>
+        <p:spPr>
+          <a:xfrm>
+            <a:off x="731520" y="1234440"/>
+            <a:ext cx="5303520" cy="4892040"/>
+          </a:xfrm>
+          <a:prstGeom prst="roundRect">
+            <a:avLst/>
+          </a:prstGeom>
+          <a:solidFill>
+            <a:srgbClr val="FEF3C7"/>
+          </a:solidFill>
+          <a:ln w="19050">
+            <a:solidFill>
+              <a:srgbClr val="D97706"/>
+            </a:solidFill>
+          </a:ln>
+        </p:spPr>
+        <p:style>
+          <a:lnRef idx="1">
+            <a:schemeClr val="accent1"/>
+          </a:lnRef>
+          <a:fillRef idx="3">
+            <a:schemeClr val="accent1"/>
+          </a:fillRef>
+          <a:effectRef idx="2">
+            <a:schemeClr val="accent1"/>
+          </a:effectRef>
+          <a:fontRef idx="minor">
+            <a:schemeClr val="lt1"/>
+          </a:fontRef>
+        </p:style>
+        <p:txBody>
+          <a:bodyPr rtlCol="0" anchor="ctr"/>
+          <a:lstStyle/>
+          <a:p>
+            <a:pPr algn="ctr"/>
+          </a:p>
+        </p:txBody>
+      </p:sp>
+      <p:sp>
+        <p:nvSpPr>
+          <p:cNvPr id="7" name="TextBox 6"/>
+          <p:cNvSpPr txBox="1"/>
+          <p:nvPr/>
+        </p:nvSpPr>
+        <p:spPr>
+          <a:xfrm>
+            <a:off x="914400" y="1371600"/>
+            <a:ext cx="4937760" cy="4572000"/>
+          </a:xfrm>
+          <a:prstGeom prst="rect">
+            <a:avLst/>
+          </a:prstGeom>
+          <a:noFill/>
+        </p:spPr>
+        <p:txBody>
+          <a:bodyPr wrap="square">
+            <a:spAutoFit/>
+          </a:bodyPr>
+          <a:lstStyle/>
+          <a:p>
+            <a:pPr>
+              <a:spcAft>
+                <a:spcPts val="1000"/>
+              </a:spcAft>
+              <a:defRPr b="1" sz="1450">
+                <a:solidFill>
+                  <a:srgbClr val="D97706"/>
+                </a:solidFill>
+              </a:defRPr>
+            </a:pPr>
+            <a:r>
+              <a:t>📚 KTU High-Yield Questions (K2 Understand)</a:t>
+            </a:r>
+          </a:p>
+          <a:p>
+            <a:pPr>
+              <a:spcAft>
+                <a:spcPts val="700"/>
+              </a:spcAft>
+              <a:defRPr sz="1200">
+                <a:solidFill>
+                  <a:srgbClr val="0F172A"/>
+                </a:solidFill>
+              </a:defRPr>
+            </a:pPr>
+            <a:r>
+              <a:t>Q: Explain the four framing methods used in the Data Link Layer with neat diagrams. (8 Marks)</a:t>
+            </a:r>
+          </a:p>
+          <a:p>
+            <a:pPr>
+              <a:spcAft>
+                <a:spcPts val="700"/>
+              </a:spcAft>
+              <a:defRPr sz="1200">
+                <a:solidFill>
+                  <a:srgbClr val="0F172A"/>
+                </a:solidFill>
+              </a:defRPr>
+            </a:pPr>
+            <a:r>
+              <a:t>Q: Given the data bit stream `01101111110111110010`, show the transmitted bit sequence after bit stuffing in HDLC. (5 Marks)</a:t>
+            </a:r>
+          </a:p>
+        </p:txBody>
+      </p:sp>
+      <p:sp>
+        <p:nvSpPr>
+          <p:cNvPr id="8" name="Rounded Rectangle 7"/>
+          <p:cNvSpPr/>
+          <p:nvPr/>
+        </p:nvSpPr>
+        <p:spPr>
+          <a:xfrm>
+            <a:off x="6309360" y="1234440"/>
+            <a:ext cx="5212080" cy="4892040"/>
+          </a:xfrm>
+          <a:prstGeom prst="roundRect">
+            <a:avLst/>
+          </a:prstGeom>
+          <a:solidFill>
+            <a:srgbClr val="EEF2FF"/>
+          </a:solidFill>
+          <a:ln w="19050">
+            <a:solidFill>
+              <a:srgbClr val="0E7490"/>
+            </a:solidFill>
+          </a:ln>
+        </p:spPr>
+        <p:style>
+          <a:lnRef idx="1">
+            <a:schemeClr val="accent1"/>
+          </a:lnRef>
+          <a:fillRef idx="3">
+            <a:schemeClr val="accent1"/>
+          </a:fillRef>
+          <a:effectRef idx="2">
+            <a:schemeClr val="accent1"/>
+          </a:effectRef>
+          <a:fontRef idx="minor">
+            <a:schemeClr val="lt1"/>
+          </a:fontRef>
+        </p:style>
+        <p:txBody>
+          <a:bodyPr rtlCol="0" anchor="ctr"/>
+          <a:lstStyle/>
+          <a:p>
+            <a:pPr algn="ctr"/>
+          </a:p>
+        </p:txBody>
+      </p:sp>
+      <p:sp>
+        <p:nvSpPr>
+          <p:cNvPr id="9" name="TextBox 8"/>
+          <p:cNvSpPr txBox="1"/>
+          <p:nvPr/>
+        </p:nvSpPr>
+        <p:spPr>
+          <a:xfrm>
+            <a:off x="6492240" y="1371600"/>
+            <a:ext cx="4846320" cy="4572000"/>
+          </a:xfrm>
+          <a:prstGeom prst="rect">
+            <a:avLst/>
+          </a:prstGeom>
+          <a:noFill/>
+        </p:spPr>
+        <p:txBody>
+          <a:bodyPr wrap="square">
+            <a:spAutoFit/>
+          </a:bodyPr>
+          <a:lstStyle/>
+          <a:p>
+            <a:pPr>
+              <a:spcAft>
+                <a:spcPts val="1000"/>
+              </a:spcAft>
+              <a:defRPr b="1" sz="1450">
+                <a:solidFill>
+                  <a:srgbClr val="0E7490"/>
+                </a:solidFill>
+              </a:defRPr>
+            </a:pPr>
+            <a:r>
+              <a:t>💡 Critical Conceptual Takeaways</a:t>
+            </a:r>
+          </a:p>
+          <a:p>
+            <a:pPr>
+              <a:spcAft>
+                <a:spcPts val="600"/>
+              </a:spcAft>
+              <a:defRPr sz="1200">
+                <a:solidFill>
+                  <a:srgbClr val="0F172A"/>
+                </a:solidFill>
+              </a:defRPr>
+            </a:pPr>
+            <a:r>
+              <a:t>✔ Bit stuffing inserts a 0 after five consecutive 1s to prevent false flag detection.</a:t>
+            </a:r>
+          </a:p>
+          <a:p>
+            <a:pPr>
+              <a:spcAft>
+                <a:spcPts val="600"/>
+              </a:spcAft>
+              <a:defRPr sz="1200">
+                <a:solidFill>
+                  <a:srgbClr val="0F172A"/>
+                </a:solidFill>
+              </a:defRPr>
+            </a:pPr>
+            <a:r>
+              <a:t>✔ Byte stuffing uses escape characters (`ESC`) to preserve transparency in character protocols.</a:t>
+            </a:r>
+          </a:p>
+          <a:p>
+            <a:pPr>
+              <a:spcAft>
+                <a:spcPts val="600"/>
+              </a:spcAft>
+              <a:defRPr sz="1200">
+                <a:solidFill>
+                  <a:srgbClr val="0F172A"/>
+                </a:solidFill>
+              </a:defRPr>
+            </a:pPr>
+            <a:r>
+              <a:t>✔ Framing enables receivers to reliably locate the start and end of frames in raw bit streams.</a:t>
+            </a:r>
+          </a:p>
+        </p:txBody>
+      </p:sp>
+      <p:sp>
+        <p:nvSpPr>
+          <p:cNvPr id="10" name="TextBox 9"/>
+          <p:cNvSpPr txBox="1"/>
+          <p:nvPr/>
+        </p:nvSpPr>
+        <p:spPr>
+          <a:xfrm>
+            <a:off x="731520" y="6327648"/>
+            <a:ext cx="10789920" cy="320040"/>
+          </a:xfrm>
+          <a:prstGeom prst="rect">
+            <a:avLst/>
+          </a:prstGeom>
+          <a:noFill/>
+        </p:spPr>
+        <p:txBody>
+          <a:bodyPr wrap="none">
+            <a:spAutoFit/>
+          </a:bodyPr>
+          <a:lstStyle/>
+          <a:p>
+            <a:pPr>
+              <a:defRPr sz="950">
+                <a:solidFill>
+                  <a:srgbClr val="64748B"/>
+                </a:solidFill>
+              </a:defRPr>
+            </a:pPr>
+            <a:r>
+              <a:t>PCCST501 Computer Networks | KTU 2024 Scheme | Prof. Anju Markose | Assistant Professor, Dept. of CSE | VJCET</a:t>
+            </a:r>
+          </a:p>
+        </p:txBody>
+      </p:sp>
+      <p:sp>
+        <p:nvSpPr>
+          <p:cNvPr id="11" name="TextBox 10"/>
+          <p:cNvSpPr txBox="1"/>
+          <p:nvPr/>
+        </p:nvSpPr>
+        <p:spPr>
+          <a:xfrm>
+            <a:off x="6858000" y="6327648"/>
+            <a:ext cx="4572000" cy="320040"/>
+          </a:xfrm>
+          <a:prstGeom prst="rect">
+            <a:avLst/>
+          </a:prstGeom>
+          <a:noFill/>
+        </p:spPr>
+        <p:txBody>
+          <a:bodyPr wrap="none">
+            <a:spAutoFit/>
+          </a:bodyPr>
+          <a:lstStyle/>
+          <a:p>
+            <a:pPr algn="r">
+              <a:defRPr sz="950">
+                <a:solidFill>
+                  <a:srgbClr val="64748B"/>
+                </a:solidFill>
+              </a:defRPr>
+            </a:pPr>
+            <a:r>
+              <a:t>Dept. of CSE, VJCET</a:t>
             </a:r>
           </a:p>
         </p:txBody>
